--- a/docs/積みゲー・コンシェルジュ_プレゼン資料.pptx
+++ b/docs/積みゲー・コンシェルジュ_プレゼン資料.pptx
@@ -4,6 +4,9 @@
   <p:sldMasterIdLst>
     <p:sldMasterId id="2147483648" r:id="rId1"/>
   </p:sldMasterIdLst>
+  <p:notesMasterIdLst>
+    <p:notesMasterId r:id="rId11"/>
+  </p:notesMasterIdLst>
   <p:sldIdLst>
     <p:sldId id="256" r:id="rId2"/>
     <p:sldId id="257" r:id="rId3"/>
@@ -15,9 +18,6 @@
     <p:sldId id="263" r:id="rId9"/>
     <p:sldId id="264" r:id="rId10"/>
   </p:sldIdLst>
-  <p:notesMasterIdLst>
-    <p:notesMasterId r:id="rId11"/>
-  </p:notesMasterIdLst>
   <p:sldSz cx="12192000" cy="6858000"/>
   <p:notesSz cx="6858000" cy="12192000"/>
   <p:defaultTextStyle>
@@ -112,6 +112,11 @@
       </a:defRPr>
     </a:lvl9pPr>
   </p:defaultTextStyle>
+  <p:extLst>
+    <p:ext uri="{EFAFB233-063F-42B5-8137-9DF3F51BA10A}">
+      <p15:sldGuideLst xmlns:p15="http://schemas.microsoft.com/office/powerpoint/2012/main"/>
+    </p:ext>
+  </p:extLst>
 </p:presentation>
 </file>
 
@@ -137,241 +142,17 @@
           <a:chExt cx="0" cy="0"/>
         </a:xfrm>
       </p:grpSpPr>
-      <p:sp>
-        <p:nvSpPr>
-          <p:cNvPr id="2" name="Header Placeholder 1"/>
-          <p:cNvSpPr>
-            <a:spLocks noGrp="1"/>
-          </p:cNvSpPr>
-          <p:nvPr>
-            <p:ph type="hdr" sz="quarter"/>
-          </p:nvPr>
-        </p:nvSpPr>
-        <p:spPr>
-          <a:xfrm>
-            <a:off x="0" y="0"/>
-            <a:ext cx="2971800" cy="458788"/>
-          </a:xfrm>
-          <a:prstGeom prst="rect">
-            <a:avLst/>
-          </a:prstGeom>
-        </p:spPr>
-        <p:txBody>
-          <a:bodyPr vert="horz" lIns="91440" tIns="45720" rIns="91440" bIns="45720" rtlCol="0"/>
-          <a:lstStyle>
-            <a:lvl1pPr algn="l">
-              <a:defRPr sz="1200"/>
-            </a:lvl1pPr>
-          </a:lstStyle>
-          <a:p>
-            <a:endParaRPr lang="en-US"/>
-          </a:p>
-        </p:txBody>
-      </p:sp>
-      <p:sp>
-        <p:nvSpPr>
-          <p:cNvPr id="3" name="Date Placeholder 2"/>
-          <p:cNvSpPr>
-            <a:spLocks noGrp="1"/>
-          </p:cNvSpPr>
-          <p:nvPr>
-            <p:ph type="dt" idx="1"/>
-          </p:nvPr>
-        </p:nvSpPr>
-        <p:spPr>
-          <a:xfrm>
-            <a:off x="3884613" y="0"/>
-            <a:ext cx="2971800" cy="458788"/>
-          </a:xfrm>
-          <a:prstGeom prst="rect">
-            <a:avLst/>
-          </a:prstGeom>
-        </p:spPr>
-        <p:txBody>
-          <a:bodyPr vert="horz" lIns="91440" tIns="45720" rIns="91440" bIns="45720" rtlCol="0"/>
-          <a:lstStyle>
-            <a:lvl1pPr algn="r">
-              <a:defRPr sz="1200"/>
-            </a:lvl1pPr>
-          </a:lstStyle>
-          <a:p>
-            <a:fld id="{5282F153-3F37-0F45-9E97-73ACFA13230C}" type="datetimeFigureOut">
-              <a:rPr lang="en-US"/>
-              <a:t>7/23/19</a:t>
-            </a:fld>
-            <a:endParaRPr lang="en-US"/>
-          </a:p>
-        </p:txBody>
-      </p:sp>
-      <p:sp>
-        <p:nvSpPr>
-          <p:cNvPr id="4" name="Slide Image Placeholder 3"/>
-          <p:cNvSpPr>
-            <a:spLocks noGrp="1" noRot="1" noChangeAspect="1"/>
-          </p:cNvSpPr>
-          <p:nvPr>
-            <p:ph type="sldImg" idx="2"/>
-          </p:nvPr>
-        </p:nvSpPr>
-        <p:spPr>
-          <a:xfrm>
-            <a:off x="685800" y="1143000"/>
-            <a:ext cx="5486400" cy="3086100"/>
-          </a:xfrm>
-          <a:prstGeom prst="rect">
-            <a:avLst/>
-          </a:prstGeom>
-          <a:noFill/>
-          <a:ln w="12700">
-            <a:solidFill>
-              <a:prstClr val="black"/>
-            </a:solidFill>
-          </a:ln>
-        </p:spPr>
-        <p:txBody>
-          <a:bodyPr vert="horz" lIns="91440" tIns="45720" rIns="91440" bIns="45720" rtlCol="0" anchor="ctr"/>
-          <a:lstStyle/>
-          <a:p>
-            <a:endParaRPr lang="en-US"/>
-          </a:p>
-        </p:txBody>
-      </p:sp>
-      <p:sp>
-        <p:nvSpPr>
-          <p:cNvPr id="5" name="Notes Placeholder 4"/>
-          <p:cNvSpPr>
-            <a:spLocks noGrp="1"/>
-          </p:cNvSpPr>
-          <p:nvPr>
-            <p:ph type="body" sz="quarter" idx="3"/>
-          </p:nvPr>
-        </p:nvSpPr>
-        <p:spPr>
-          <a:xfrm>
-            <a:off x="685800" y="4400550"/>
-            <a:ext cx="5486400" cy="3600450"/>
-          </a:xfrm>
-          <a:prstGeom prst="rect">
-            <a:avLst/>
-          </a:prstGeom>
-        </p:spPr>
-        <p:txBody>
-          <a:bodyPr vert="horz" lIns="91440" tIns="45720" rIns="91440" bIns="45720" rtlCol="0"/>
-          <a:lstStyle/>
-          <a:p>
-            <a:pPr lvl="0"/>
-            <a:r>
-              <a:rPr lang="en-US"/>
-              <a:t>Click to edit Master text styles</a:t>
-            </a:r>
-          </a:p>
-          <a:p>
-            <a:pPr lvl="1"/>
-            <a:r>
-              <a:rPr lang="en-US"/>
-              <a:t>Second level</a:t>
-            </a:r>
-          </a:p>
-          <a:p>
-            <a:pPr lvl="2"/>
-            <a:r>
-              <a:rPr lang="en-US"/>
-              <a:t>Third level</a:t>
-            </a:r>
-          </a:p>
-          <a:p>
-            <a:pPr lvl="3"/>
-            <a:r>
-              <a:rPr lang="en-US"/>
-              <a:t>Fourth level</a:t>
-            </a:r>
-          </a:p>
-          <a:p>
-            <a:pPr lvl="4"/>
-            <a:r>
-              <a:rPr lang="en-US"/>
-              <a:t>Fifth level</a:t>
-            </a:r>
-          </a:p>
-        </p:txBody>
-      </p:sp>
-      <p:sp>
-        <p:nvSpPr>
-          <p:cNvPr id="6" name="Footer Placeholder 5"/>
-          <p:cNvSpPr>
-            <a:spLocks noGrp="1"/>
-          </p:cNvSpPr>
-          <p:nvPr>
-            <p:ph type="ftr" sz="quarter" idx="4"/>
-          </p:nvPr>
-        </p:nvSpPr>
-        <p:spPr>
-          <a:xfrm>
-            <a:off x="0" y="8685213"/>
-            <a:ext cx="2971800" cy="458787"/>
-          </a:xfrm>
-          <a:prstGeom prst="rect">
-            <a:avLst/>
-          </a:prstGeom>
-        </p:spPr>
-        <p:txBody>
-          <a:bodyPr vert="horz" lIns="91440" tIns="45720" rIns="91440" bIns="45720" rtlCol="0" anchor="b"/>
-          <a:lstStyle>
-            <a:lvl1pPr algn="l">
-              <a:defRPr sz="1200"/>
-            </a:lvl1pPr>
-          </a:lstStyle>
-          <a:p>
-            <a:endParaRPr lang="en-US"/>
-          </a:p>
-        </p:txBody>
-      </p:sp>
-      <p:sp>
-        <p:nvSpPr>
-          <p:cNvPr id="7" name="Slide Number Placeholder 6"/>
-          <p:cNvSpPr>
-            <a:spLocks noGrp="1"/>
-          </p:cNvSpPr>
-          <p:nvPr>
-            <p:ph type="sldNum" sz="quarter" idx="5"/>
-          </p:nvPr>
-        </p:nvSpPr>
-        <p:spPr>
-          <a:xfrm>
-            <a:off x="3884613" y="8685213"/>
-            <a:ext cx="2971800" cy="458787"/>
-          </a:xfrm>
-          <a:prstGeom prst="rect">
-            <a:avLst/>
-          </a:prstGeom>
-        </p:spPr>
-        <p:txBody>
-          <a:bodyPr vert="horz" lIns="91440" tIns="45720" rIns="91440" bIns="45720" rtlCol="0" anchor="b"/>
-          <a:lstStyle>
-            <a:lvl1pPr algn="r">
-              <a:defRPr sz="1200"/>
-            </a:lvl1pPr>
-          </a:lstStyle>
-          <a:p>
-            <a:fld id="{CE5E9CC1-C706-0F49-92D6-E571CC5EEA8F}" type="slidenum">
-              <a:rPr lang="en-US"/>
-              <a:t>‹#›</a:t>
-            </a:fld>
-            <a:endParaRPr lang="en-US"/>
-          </a:p>
-        </p:txBody>
-      </p:sp>
     </p:spTree>
     <p:extLst>
       <p:ext uri="{BB962C8B-B14F-4D97-AF65-F5344CB8AC3E}">
-        <p14:creationId xmlns:p14="http://schemas.microsoft.com/office/powerpoint/2010/main" val="1024086991"/>
+        <p14:creationId xmlns:p14="http://schemas.microsoft.com/office/powerpoint/2010/main" val="2556036262"/>
       </p:ext>
     </p:extLst>
   </p:cSld>
   <p:clrMap bg1="lt1" tx1="dk1" bg2="lt2" tx2="dk2" accent1="accent1" accent2="accent2" accent3="accent3" accent4="accent4" accent5="accent5" accent6="accent6" hlink="hlink" folHlink="folHlink"/>
   <p:notesStyle>
     <a:lvl1pPr marL="0" algn="l" defTabSz="914400" rtl="0" eaLnBrk="1" latinLnBrk="0" hangingPunct="1">
-      <a:defRPr sz="1200" kern="1200">
+      <a:defRPr kumimoji="1" sz="1200" kern="1200">
         <a:solidFill>
           <a:schemeClr val="tx1"/>
         </a:solidFill>
@@ -381,7 +162,7 @@
       </a:defRPr>
     </a:lvl1pPr>
     <a:lvl2pPr marL="457200" algn="l" defTabSz="914400" rtl="0" eaLnBrk="1" latinLnBrk="0" hangingPunct="1">
-      <a:defRPr sz="1200" kern="1200">
+      <a:defRPr kumimoji="1" sz="1200" kern="1200">
         <a:solidFill>
           <a:schemeClr val="tx1"/>
         </a:solidFill>
@@ -391,7 +172,7 @@
       </a:defRPr>
     </a:lvl2pPr>
     <a:lvl3pPr marL="914400" algn="l" defTabSz="914400" rtl="0" eaLnBrk="1" latinLnBrk="0" hangingPunct="1">
-      <a:defRPr sz="1200" kern="1200">
+      <a:defRPr kumimoji="1" sz="1200" kern="1200">
         <a:solidFill>
           <a:schemeClr val="tx1"/>
         </a:solidFill>
@@ -401,7 +182,7 @@
       </a:defRPr>
     </a:lvl3pPr>
     <a:lvl4pPr marL="1371600" algn="l" defTabSz="914400" rtl="0" eaLnBrk="1" latinLnBrk="0" hangingPunct="1">
-      <a:defRPr sz="1200" kern="1200">
+      <a:defRPr kumimoji="1" sz="1200" kern="1200">
         <a:solidFill>
           <a:schemeClr val="tx1"/>
         </a:solidFill>
@@ -411,7 +192,7 @@
       </a:defRPr>
     </a:lvl4pPr>
     <a:lvl5pPr marL="1828800" algn="l" defTabSz="914400" rtl="0" eaLnBrk="1" latinLnBrk="0" hangingPunct="1">
-      <a:defRPr sz="1200" kern="1200">
+      <a:defRPr kumimoji="1" sz="1200" kern="1200">
         <a:solidFill>
           <a:schemeClr val="tx1"/>
         </a:solidFill>
@@ -421,7 +202,7 @@
       </a:defRPr>
     </a:lvl5pPr>
     <a:lvl6pPr marL="2286000" algn="l" defTabSz="914400" rtl="0" eaLnBrk="1" latinLnBrk="0" hangingPunct="1">
-      <a:defRPr sz="1200" kern="1200">
+      <a:defRPr kumimoji="1" sz="1200" kern="1200">
         <a:solidFill>
           <a:schemeClr val="tx1"/>
         </a:solidFill>
@@ -431,7 +212,7 @@
       </a:defRPr>
     </a:lvl6pPr>
     <a:lvl7pPr marL="2743200" algn="l" defTabSz="914400" rtl="0" eaLnBrk="1" latinLnBrk="0" hangingPunct="1">
-      <a:defRPr sz="1200" kern="1200">
+      <a:defRPr kumimoji="1" sz="1200" kern="1200">
         <a:solidFill>
           <a:schemeClr val="tx1"/>
         </a:solidFill>
@@ -441,7 +222,7 @@
       </a:defRPr>
     </a:lvl7pPr>
     <a:lvl8pPr marL="3200400" algn="l" defTabSz="914400" rtl="0" eaLnBrk="1" latinLnBrk="0" hangingPunct="1">
-      <a:defRPr sz="1200" kern="1200">
+      <a:defRPr kumimoji="1" sz="1200" kern="1200">
         <a:solidFill>
           <a:schemeClr val="tx1"/>
         </a:solidFill>
@@ -451,7 +232,7 @@
       </a:defRPr>
     </a:lvl8pPr>
     <a:lvl9pPr marL="3657600" algn="l" defTabSz="914400" rtl="0" eaLnBrk="1" latinLnBrk="0" hangingPunct="1">
-      <a:defRPr sz="1200" kern="1200">
+      <a:defRPr kumimoji="1" sz="1200" kern="1200">
         <a:solidFill>
           <a:schemeClr val="tx1"/>
         </a:solidFill>
@@ -512,7 +293,6 @@
               <a:rPr lang="en-US" dirty="0"/>
               <a:t>導入トーク：「ゲームを買うほど積みゲーが増えて、罪悪感でさらに新しいゲームに手を出しにくくなる」というゲーマーあるあるから発想したアプリです、という自己紹介から入る。タイトルとキャッチコピーを読み上げつつ、5〜7分の持ち時間なので簡潔に。</a:t>
             </a:r>
-            <a:endParaRPr lang="en-US" dirty="0"/>
           </a:p>
         </p:txBody>
       </p:sp>
@@ -600,7 +380,6 @@
               <a:rPr lang="en-US" dirty="0"/>
               <a:t>「積みゲーが増えるほど罪悪感で余計に手が伸びなくなる」という悩みへの共感から入り、それをAIが後押しするアプリだと説明する。</a:t>
             </a:r>
-            <a:endParaRPr lang="en-US" dirty="0"/>
           </a:p>
         </p:txBody>
       </p:sp>
@@ -688,7 +467,6 @@
               <a:rPr lang="en-US" dirty="0"/>
               <a:t>ペルソナを一言で紹介し、「自分にも心当たりがある」と共感を得ることを狙う。</a:t>
             </a:r>
-            <a:endParaRPr lang="en-US" dirty="0"/>
           </a:p>
         </p:txBody>
       </p:sp>
@@ -776,7 +554,6 @@
               <a:rPr lang="en-US" dirty="0"/>
               <a:t>4機能を読み上げるのではなく、「積む→放置して罪悪感→AIが後押し→クリアでポイント」という一連の流れとして説明する。</a:t>
             </a:r>
-            <a:endParaRPr lang="en-US" dirty="0"/>
           </a:p>
         </p:txBody>
       </p:sp>
@@ -864,7 +641,6 @@
               <a:rPr lang="en-US" dirty="0"/>
               <a:t>デモで見せる候補：①ホーム画面の「今日の1本」AIレコメンド ②ゲーム登録→ステータス変更→ポイント獲得の一連の流れ ③積みゲー城の変化 or 通知ベル。時間が押していたら①のみでも良い。</a:t>
             </a:r>
-            <a:endParaRPr lang="en-US" dirty="0"/>
           </a:p>
         </p:txBody>
       </p:sp>
@@ -952,7 +728,6 @@
               <a:rPr lang="en-US" dirty="0"/>
               <a:t>技術スタック表は読み上げず、「Next.js + Prisma + MySQLの一般的なWeb構成に、AI(Gemini)と外部API(RAWG)を組み合わせた」と要点だけ話す。</a:t>
             </a:r>
-            <a:endParaRPr lang="en-US" dirty="0"/>
           </a:p>
         </p:txBody>
       </p:sp>
@@ -1040,7 +815,6 @@
               <a:rPr lang="en-US" dirty="0"/>
               <a:t>必須機能・追加機能ともに全部実装できたことを端的に伝え、時間が押していたら詳細は割愛して良い。</a:t>
             </a:r>
-            <a:endParaRPr lang="en-US" dirty="0"/>
           </a:p>
         </p:txBody>
       </p:sp>
@@ -1128,7 +902,6 @@
               <a:rPr lang="en-US" dirty="0"/>
               <a:t>「できなかった」をネガティブに話しすぎず、優先順位づけの結果であることを伝える。特にブラウザPush通知は技術的な判断であることを一言添える。</a:t>
             </a:r>
-            <a:endParaRPr lang="en-US" dirty="0"/>
           </a:p>
         </p:txBody>
       </p:sp>
@@ -1224,7 +997,6 @@
 ・見た目に問題が無くても、実際にブラウザで動かして初めて気づく不具合がある（例：スマホ幅でのレイアウト崩れ、トグルのズレ）
 ・機能を作って終わりではなく、「本当に仕様通りか」を後から見直す時間も大事</a:t>
             </a:r>
-            <a:endParaRPr lang="en-US" dirty="0"/>
           </a:p>
         </p:txBody>
       </p:sp>
@@ -1297,6 +1069,11 @@
 <file path=ppt/slideMasters/slideMaster1.xml><?xml version="1.0" encoding="utf-8"?>
 <p:sldMaster xmlns:a="http://schemas.openxmlformats.org/drawingml/2006/main" xmlns:r="http://schemas.openxmlformats.org/officeDocument/2006/relationships" xmlns:p="http://schemas.openxmlformats.org/presentationml/2006/main">
   <p:cSld>
+    <p:bg>
+      <p:bgRef idx="1001">
+        <a:schemeClr val="bg1"/>
+      </p:bgRef>
+    </p:bg>
     <p:spTree>
       <p:nvGrpSpPr>
         <p:cNvPr id="1" name=""/>
@@ -1579,6 +1356,7 @@
         <a:solidFill>
           <a:srgbClr val="1E1B3A"/>
         </a:solidFill>
+        <a:effectLst/>
       </p:bgPr>
     </p:bg>
     <p:spTree>
@@ -1614,17 +1392,24 @@
           </a:solidFill>
           <a:ln/>
         </p:spPr>
+        <p:txBody>
+          <a:bodyPr/>
+          <a:lstStyle/>
+          <a:p>
+            <a:endParaRPr lang="ja-JP" altLang="en-US"/>
+          </a:p>
+        </p:txBody>
       </p:sp>
       <p:pic>
         <p:nvPicPr>
-          <p:cNvPr id="3" name="Image 0" descr="C:\Users\250028\AppData\Local\Temp\claude\C--laragon-www-Tsumige-Concierge\ad98fe4e-e237-4b8f-b37f-9ac5cabaa7e2\scratchpad\pptx/icon_gamepad_navy.png">    </p:cNvPr>
+          <p:cNvPr id="3" name="Image 0" descr="C:\Users\250028\AppData\Local\Temp\claude\C--laragon-www-Tsumige-Concierge\ad98fe4e-e237-4b8f-b37f-9ac5cabaa7e2\scratchpad\pptx/icon_gamepad_navy.png"/>
           <p:cNvPicPr>
             <a:picLocks noChangeAspect="1"/>
           </p:cNvPicPr>
           <p:nvPr/>
         </p:nvPicPr>
         <p:blipFill>
-          <a:blip r:embed="rId1"/>
+          <a:blip r:embed="rId3"/>
           <a:stretch>
             <a:fillRect/>
           </a:stretch>
@@ -1660,7 +1445,7 @@
           <a:bodyPr wrap="square" lIns="0" tIns="0" rIns="0" bIns="0" rtlCol="0" anchor="ctr"/>
           <a:lstStyle/>
           <a:p>
-            <a:pPr algn="ctr" indent="0" marL="0">
+            <a:pPr marL="0" indent="0" algn="ctr">
               <a:buNone/>
             </a:pPr>
             <a:r>
@@ -1699,7 +1484,7 @@
           <a:bodyPr wrap="square" lIns="0" tIns="0" rIns="0" bIns="0" rtlCol="0" anchor="ctr"/>
           <a:lstStyle/>
           <a:p>
-            <a:pPr algn="ctr" indent="0" marL="0">
+            <a:pPr marL="0" indent="0" algn="ctr">
               <a:buNone/>
             </a:pPr>
             <a:r>
@@ -1738,7 +1523,7 @@
           <a:bodyPr wrap="square" lIns="0" tIns="0" rIns="0" bIns="0" rtlCol="0" anchor="ctr"/>
           <a:lstStyle/>
           <a:p>
-            <a:pPr algn="ctr" indent="0" marL="0">
+            <a:pPr marL="0" indent="0" algn="ctr">
               <a:buNone/>
             </a:pPr>
             <a:r>
@@ -1772,6 +1557,7 @@
         <a:solidFill>
           <a:srgbClr val="FFFFFF"/>
         </a:solidFill>
+        <a:effectLst/>
       </p:bgPr>
     </p:bg>
     <p:spTree>
@@ -1807,17 +1593,24 @@
           </a:solidFill>
           <a:ln/>
         </p:spPr>
+        <p:txBody>
+          <a:bodyPr/>
+          <a:lstStyle/>
+          <a:p>
+            <a:endParaRPr lang="ja-JP" altLang="en-US"/>
+          </a:p>
+        </p:txBody>
       </p:sp>
       <p:pic>
         <p:nvPicPr>
-          <p:cNvPr id="3" name="Image 0" descr="C:\Users\250028\AppData\Local\Temp\claude\C--laragon-www-Tsumige-Concierge\ad98fe4e-e237-4b8f-b37f-9ac5cabaa7e2\scratchpad\pptx/icon_gamepad_white.png">    </p:cNvPr>
+          <p:cNvPr id="3" name="Image 0" descr="C:\Users\250028\AppData\Local\Temp\claude\C--laragon-www-Tsumige-Concierge\ad98fe4e-e237-4b8f-b37f-9ac5cabaa7e2\scratchpad\pptx/icon_gamepad_white.png"/>
           <p:cNvPicPr>
             <a:picLocks noChangeAspect="1"/>
           </p:cNvPicPr>
           <p:nvPr/>
         </p:nvPicPr>
         <p:blipFill>
-          <a:blip r:embed="rId1"/>
+          <a:blip r:embed="rId3"/>
           <a:stretch>
             <a:fillRect/>
           </a:stretch>
@@ -1853,7 +1646,7 @@
           <a:bodyPr wrap="square" lIns="0" tIns="0" rIns="0" bIns="0" rtlCol="0" anchor="ctr"/>
           <a:lstStyle/>
           <a:p>
-            <a:pPr indent="0" marL="0">
+            <a:pPr marL="0" indent="0">
               <a:buNone/>
             </a:pPr>
             <a:r>
@@ -1890,17 +1683,24 @@
           </a:solidFill>
           <a:ln/>
         </p:spPr>
+        <p:txBody>
+          <a:bodyPr/>
+          <a:lstStyle/>
+          <a:p>
+            <a:endParaRPr lang="ja-JP" altLang="en-US"/>
+          </a:p>
+        </p:txBody>
       </p:sp>
       <p:pic>
         <p:nvPicPr>
-          <p:cNvPr id="6" name="Image 1" descr="C:\Users\250028\AppData\Local\Temp\claude\C--laragon-www-Tsumige-Concierge\ad98fe4e-e237-4b8f-b37f-9ac5cabaa7e2\scratchpad\pptx/icon_gamepad_white.png">    </p:cNvPr>
+          <p:cNvPr id="6" name="Image 1" descr="C:\Users\250028\AppData\Local\Temp\claude\C--laragon-www-Tsumige-Concierge\ad98fe4e-e237-4b8f-b37f-9ac5cabaa7e2\scratchpad\pptx/icon_gamepad_white.png"/>
           <p:cNvPicPr>
             <a:picLocks noChangeAspect="1"/>
           </p:cNvPicPr>
           <p:nvPr/>
         </p:nvPicPr>
         <p:blipFill>
-          <a:blip r:embed="rId2"/>
+          <a:blip r:embed="rId3"/>
           <a:stretch>
             <a:fillRect/>
           </a:stretch>
@@ -1936,7 +1736,7 @@
           <a:bodyPr wrap="square" lIns="0" tIns="0" rIns="0" bIns="0" rtlCol="0" anchor="t"/>
           <a:lstStyle/>
           <a:p>
-            <a:pPr indent="0" marL="0">
+            <a:pPr marL="0" indent="0">
               <a:buNone/>
             </a:pPr>
             <a:r>
@@ -2015,7 +1815,7 @@
           <a:bodyPr wrap="square" lIns="0" tIns="0" rIns="0" bIns="0" rtlCol="0" anchor="ctr"/>
           <a:lstStyle/>
           <a:p>
-            <a:pPr algn="r" indent="0" marL="0">
+            <a:pPr marL="0" indent="0" algn="r">
               <a:buNone/>
             </a:pPr>
             <a:r>
@@ -2049,6 +1849,7 @@
         <a:solidFill>
           <a:srgbClr val="FFFFFF"/>
         </a:solidFill>
+        <a:effectLst/>
       </p:bgPr>
     </p:bg>
     <p:spTree>
@@ -2084,17 +1885,24 @@
           </a:solidFill>
           <a:ln/>
         </p:spPr>
+        <p:txBody>
+          <a:bodyPr/>
+          <a:lstStyle/>
+          <a:p>
+            <a:endParaRPr lang="ja-JP" altLang="en-US"/>
+          </a:p>
+        </p:txBody>
       </p:sp>
       <p:pic>
         <p:nvPicPr>
-          <p:cNvPr id="3" name="Image 0" descr="C:\Users\250028\AppData\Local\Temp\claude\C--laragon-www-Tsumige-Concierge\ad98fe4e-e237-4b8f-b37f-9ac5cabaa7e2\scratchpad\pptx/icon_bullseye_white.png">    </p:cNvPr>
+          <p:cNvPr id="3" name="Image 0" descr="C:\Users\250028\AppData\Local\Temp\claude\C--laragon-www-Tsumige-Concierge\ad98fe4e-e237-4b8f-b37f-9ac5cabaa7e2\scratchpad\pptx/icon_bullseye_white.png"/>
           <p:cNvPicPr>
             <a:picLocks noChangeAspect="1"/>
           </p:cNvPicPr>
           <p:nvPr/>
         </p:nvPicPr>
         <p:blipFill>
-          <a:blip r:embed="rId1"/>
+          <a:blip r:embed="rId3"/>
           <a:stretch>
             <a:fillRect/>
           </a:stretch>
@@ -2130,7 +1938,7 @@
           <a:bodyPr wrap="square" lIns="0" tIns="0" rIns="0" bIns="0" rtlCol="0" anchor="ctr"/>
           <a:lstStyle/>
           <a:p>
-            <a:pPr indent="0" marL="0">
+            <a:pPr marL="0" indent="0">
               <a:buNone/>
             </a:pPr>
             <a:r>
@@ -2167,17 +1975,24 @@
           </a:solidFill>
           <a:ln/>
         </p:spPr>
+        <p:txBody>
+          <a:bodyPr/>
+          <a:lstStyle/>
+          <a:p>
+            <a:endParaRPr lang="ja-JP" altLang="en-US"/>
+          </a:p>
+        </p:txBody>
       </p:sp>
       <p:pic>
         <p:nvPicPr>
-          <p:cNvPr id="6" name="Image 1" descr="C:\Users\250028\AppData\Local\Temp\claude\C--laragon-www-Tsumige-Concierge\ad98fe4e-e237-4b8f-b37f-9ac5cabaa7e2\scratchpad\pptx/icon_bullseye_white.png">    </p:cNvPr>
+          <p:cNvPr id="6" name="Image 1" descr="C:\Users\250028\AppData\Local\Temp\claude\C--laragon-www-Tsumige-Concierge\ad98fe4e-e237-4b8f-b37f-9ac5cabaa7e2\scratchpad\pptx/icon_bullseye_white.png"/>
           <p:cNvPicPr>
             <a:picLocks noChangeAspect="1"/>
           </p:cNvPicPr>
           <p:nvPr/>
         </p:nvPicPr>
         <p:blipFill>
-          <a:blip r:embed="rId2"/>
+          <a:blip r:embed="rId3"/>
           <a:stretch>
             <a:fillRect/>
           </a:stretch>
@@ -2213,6 +2028,13 @@
           </a:solidFill>
           <a:ln/>
         </p:spPr>
+        <p:txBody>
+          <a:bodyPr/>
+          <a:lstStyle/>
+          <a:p>
+            <a:endParaRPr lang="ja-JP" altLang="en-US"/>
+          </a:p>
+        </p:txBody>
       </p:sp>
       <p:sp>
         <p:nvSpPr>
@@ -2235,7 +2057,7 @@
           <a:bodyPr wrap="square" lIns="0" tIns="0" rIns="0" bIns="0" rtlCol="0" anchor="ctr"/>
           <a:lstStyle/>
           <a:p>
-            <a:pPr indent="0" marL="0">
+            <a:pPr marL="0" indent="0">
               <a:buNone/>
             </a:pPr>
             <a:r>
@@ -2338,7 +2160,7 @@
           <a:bodyPr wrap="square" lIns="0" tIns="0" rIns="0" bIns="0" rtlCol="0" anchor="ctr"/>
           <a:lstStyle/>
           <a:p>
-            <a:pPr algn="r" indent="0" marL="0">
+            <a:pPr marL="0" indent="0" algn="r">
               <a:buNone/>
             </a:pPr>
             <a:r>
@@ -2372,6 +2194,7 @@
         <a:solidFill>
           <a:srgbClr val="FFFFFF"/>
         </a:solidFill>
+        <a:effectLst/>
       </p:bgPr>
     </p:bg>
     <p:spTree>
@@ -2407,17 +2230,24 @@
           </a:solidFill>
           <a:ln/>
         </p:spPr>
+        <p:txBody>
+          <a:bodyPr/>
+          <a:lstStyle/>
+          <a:p>
+            <a:endParaRPr lang="ja-JP" altLang="en-US"/>
+          </a:p>
+        </p:txBody>
       </p:sp>
       <p:pic>
         <p:nvPicPr>
-          <p:cNvPr id="3" name="Image 0" descr="C:\Users\250028\AppData\Local\Temp\claude\C--laragon-www-Tsumige-Concierge\ad98fe4e-e237-4b8f-b37f-9ac5cabaa7e2\scratchpad\pptx/icon_comments_white.png">    </p:cNvPr>
+          <p:cNvPr id="3" name="Image 0" descr="C:\Users\250028\AppData\Local\Temp\claude\C--laragon-www-Tsumige-Concierge\ad98fe4e-e237-4b8f-b37f-9ac5cabaa7e2\scratchpad\pptx/icon_comments_white.png"/>
           <p:cNvPicPr>
             <a:picLocks noChangeAspect="1"/>
           </p:cNvPicPr>
           <p:nvPr/>
         </p:nvPicPr>
         <p:blipFill>
-          <a:blip r:embed="rId1"/>
+          <a:blip r:embed="rId3"/>
           <a:stretch>
             <a:fillRect/>
           </a:stretch>
@@ -2453,7 +2283,7 @@
           <a:bodyPr wrap="square" lIns="0" tIns="0" rIns="0" bIns="0" rtlCol="0" anchor="ctr"/>
           <a:lstStyle/>
           <a:p>
-            <a:pPr indent="0" marL="0">
+            <a:pPr marL="0" indent="0">
               <a:buNone/>
             </a:pPr>
             <a:r>
@@ -2492,6 +2322,13 @@
           </a:solidFill>
           <a:ln/>
         </p:spPr>
+        <p:txBody>
+          <a:bodyPr/>
+          <a:lstStyle/>
+          <a:p>
+            <a:endParaRPr lang="ja-JP" altLang="en-US"/>
+          </a:p>
+        </p:txBody>
       </p:sp>
       <p:sp>
         <p:nvSpPr>
@@ -2512,17 +2349,24 @@
           </a:solidFill>
           <a:ln/>
         </p:spPr>
+        <p:txBody>
+          <a:bodyPr/>
+          <a:lstStyle/>
+          <a:p>
+            <a:endParaRPr lang="ja-JP" altLang="en-US"/>
+          </a:p>
+        </p:txBody>
       </p:sp>
       <p:pic>
         <p:nvPicPr>
-          <p:cNvPr id="7" name="Image 1" descr="C:\Users\250028\AppData\Local\Temp\claude\C--laragon-www-Tsumige-Concierge\ad98fe4e-e237-4b8f-b37f-9ac5cabaa7e2\scratchpad\pptx/icon_clipboard_white.png">    </p:cNvPr>
+          <p:cNvPr id="7" name="Image 1" descr="C:\Users\250028\AppData\Local\Temp\claude\C--laragon-www-Tsumige-Concierge\ad98fe4e-e237-4b8f-b37f-9ac5cabaa7e2\scratchpad\pptx/icon_clipboard_white.png"/>
           <p:cNvPicPr>
             <a:picLocks noChangeAspect="1"/>
           </p:cNvPicPr>
           <p:nvPr/>
         </p:nvPicPr>
         <p:blipFill>
-          <a:blip r:embed="rId2"/>
+          <a:blip r:embed="rId4"/>
           <a:stretch>
             <a:fillRect/>
           </a:stretch>
@@ -2558,7 +2402,7 @@
           <a:bodyPr wrap="square" lIns="0" tIns="0" rIns="0" bIns="0" rtlCol="0" anchor="ctr"/>
           <a:lstStyle/>
           <a:p>
-            <a:pPr indent="0" marL="0">
+            <a:pPr marL="0" indent="0">
               <a:buNone/>
             </a:pPr>
             <a:r>
@@ -2597,7 +2441,7 @@
           <a:bodyPr wrap="square" lIns="0" tIns="0" rIns="0" bIns="0" rtlCol="0" anchor="t"/>
           <a:lstStyle/>
           <a:p>
-            <a:pPr indent="0" marL="0">
+            <a:pPr marL="0" indent="0">
               <a:buNone/>
             </a:pPr>
             <a:r>
@@ -2636,6 +2480,13 @@
           </a:solidFill>
           <a:ln/>
         </p:spPr>
+        <p:txBody>
+          <a:bodyPr/>
+          <a:lstStyle/>
+          <a:p>
+            <a:endParaRPr lang="ja-JP" altLang="en-US"/>
+          </a:p>
+        </p:txBody>
       </p:sp>
       <p:sp>
         <p:nvSpPr>
@@ -2656,17 +2507,24 @@
           </a:solidFill>
           <a:ln/>
         </p:spPr>
+        <p:txBody>
+          <a:bodyPr/>
+          <a:lstStyle/>
+          <a:p>
+            <a:endParaRPr lang="ja-JP" altLang="en-US"/>
+          </a:p>
+        </p:txBody>
       </p:sp>
       <p:pic>
         <p:nvPicPr>
-          <p:cNvPr id="12" name="Image 2" descr="C:\Users\250028\AppData\Local\Temp\claude\C--laragon-www-Tsumige-Concierge\ad98fe4e-e237-4b8f-b37f-9ac5cabaa7e2\scratchpad\pptx/icon_robot_white.png">    </p:cNvPr>
+          <p:cNvPr id="12" name="Image 2" descr="C:\Users\250028\AppData\Local\Temp\claude\C--laragon-www-Tsumige-Concierge\ad98fe4e-e237-4b8f-b37f-9ac5cabaa7e2\scratchpad\pptx/icon_robot_white.png"/>
           <p:cNvPicPr>
             <a:picLocks noChangeAspect="1"/>
           </p:cNvPicPr>
           <p:nvPr/>
         </p:nvPicPr>
         <p:blipFill>
-          <a:blip r:embed="rId3"/>
+          <a:blip r:embed="rId5"/>
           <a:stretch>
             <a:fillRect/>
           </a:stretch>
@@ -2702,7 +2560,7 @@
           <a:bodyPr wrap="square" lIns="0" tIns="0" rIns="0" bIns="0" rtlCol="0" anchor="ctr"/>
           <a:lstStyle/>
           <a:p>
-            <a:pPr indent="0" marL="0">
+            <a:pPr marL="0" indent="0">
               <a:buNone/>
             </a:pPr>
             <a:r>
@@ -2741,7 +2599,7 @@
           <a:bodyPr wrap="square" lIns="0" tIns="0" rIns="0" bIns="0" rtlCol="0" anchor="t"/>
           <a:lstStyle/>
           <a:p>
-            <a:pPr indent="0" marL="0">
+            <a:pPr marL="0" indent="0">
               <a:buNone/>
             </a:pPr>
             <a:r>
@@ -2780,6 +2638,13 @@
           </a:solidFill>
           <a:ln/>
         </p:spPr>
+        <p:txBody>
+          <a:bodyPr/>
+          <a:lstStyle/>
+          <a:p>
+            <a:endParaRPr lang="ja-JP" altLang="en-US"/>
+          </a:p>
+        </p:txBody>
       </p:sp>
       <p:sp>
         <p:nvSpPr>
@@ -2800,17 +2665,24 @@
           </a:solidFill>
           <a:ln/>
         </p:spPr>
+        <p:txBody>
+          <a:bodyPr/>
+          <a:lstStyle/>
+          <a:p>
+            <a:endParaRPr lang="ja-JP" altLang="en-US"/>
+          </a:p>
+        </p:txBody>
       </p:sp>
       <p:pic>
         <p:nvPicPr>
-          <p:cNvPr id="17" name="Image 3" descr="C:\Users\250028\AppData\Local\Temp\claude\C--laragon-www-Tsumige-Concierge\ad98fe4e-e237-4b8f-b37f-9ac5cabaa7e2\scratchpad\pptx/icon_king_white.png">    </p:cNvPr>
+          <p:cNvPr id="17" name="Image 3" descr="C:\Users\250028\AppData\Local\Temp\claude\C--laragon-www-Tsumige-Concierge\ad98fe4e-e237-4b8f-b37f-9ac5cabaa7e2\scratchpad\pptx/icon_king_white.png"/>
           <p:cNvPicPr>
             <a:picLocks noChangeAspect="1"/>
           </p:cNvPicPr>
           <p:nvPr/>
         </p:nvPicPr>
         <p:blipFill>
-          <a:blip r:embed="rId4"/>
+          <a:blip r:embed="rId6"/>
           <a:stretch>
             <a:fillRect/>
           </a:stretch>
@@ -2846,7 +2718,7 @@
           <a:bodyPr wrap="square" lIns="0" tIns="0" rIns="0" bIns="0" rtlCol="0" anchor="ctr"/>
           <a:lstStyle/>
           <a:p>
-            <a:pPr indent="0" marL="0">
+            <a:pPr marL="0" indent="0">
               <a:buNone/>
             </a:pPr>
             <a:r>
@@ -2885,7 +2757,7 @@
           <a:bodyPr wrap="square" lIns="0" tIns="0" rIns="0" bIns="0" rtlCol="0" anchor="t"/>
           <a:lstStyle/>
           <a:p>
-            <a:pPr indent="0" marL="0">
+            <a:pPr marL="0" indent="0">
               <a:buNone/>
             </a:pPr>
             <a:r>
@@ -2924,6 +2796,13 @@
           </a:solidFill>
           <a:ln/>
         </p:spPr>
+        <p:txBody>
+          <a:bodyPr/>
+          <a:lstStyle/>
+          <a:p>
+            <a:endParaRPr lang="ja-JP" altLang="en-US"/>
+          </a:p>
+        </p:txBody>
       </p:sp>
       <p:sp>
         <p:nvSpPr>
@@ -2944,17 +2823,24 @@
           </a:solidFill>
           <a:ln/>
         </p:spPr>
+        <p:txBody>
+          <a:bodyPr/>
+          <a:lstStyle/>
+          <a:p>
+            <a:endParaRPr lang="ja-JP" altLang="en-US"/>
+          </a:p>
+        </p:txBody>
       </p:sp>
       <p:pic>
         <p:nvPicPr>
-          <p:cNvPr id="22" name="Image 4" descr="C:\Users\250028\AppData\Local\Temp\claude\C--laragon-www-Tsumige-Concierge\ad98fe4e-e237-4b8f-b37f-9ac5cabaa7e2\scratchpad\pptx/icon_bell_white.png">    </p:cNvPr>
+          <p:cNvPr id="22" name="Image 4" descr="C:\Users\250028\AppData\Local\Temp\claude\C--laragon-www-Tsumige-Concierge\ad98fe4e-e237-4b8f-b37f-9ac5cabaa7e2\scratchpad\pptx/icon_bell_white.png"/>
           <p:cNvPicPr>
             <a:picLocks noChangeAspect="1"/>
           </p:cNvPicPr>
           <p:nvPr/>
         </p:nvPicPr>
         <p:blipFill>
-          <a:blip r:embed="rId5"/>
+          <a:blip r:embed="rId7"/>
           <a:stretch>
             <a:fillRect/>
           </a:stretch>
@@ -2990,7 +2876,7 @@
           <a:bodyPr wrap="square" lIns="0" tIns="0" rIns="0" bIns="0" rtlCol="0" anchor="ctr"/>
           <a:lstStyle/>
           <a:p>
-            <a:pPr indent="0" marL="0">
+            <a:pPr marL="0" indent="0">
               <a:buNone/>
             </a:pPr>
             <a:r>
@@ -3029,7 +2915,7 @@
           <a:bodyPr wrap="square" lIns="0" tIns="0" rIns="0" bIns="0" rtlCol="0" anchor="t"/>
           <a:lstStyle/>
           <a:p>
-            <a:pPr indent="0" marL="0">
+            <a:pPr marL="0" indent="0">
               <a:buNone/>
             </a:pPr>
             <a:r>
@@ -3068,7 +2954,7 @@
           <a:bodyPr wrap="square" lIns="0" tIns="0" rIns="0" bIns="0" rtlCol="0" anchor="ctr"/>
           <a:lstStyle/>
           <a:p>
-            <a:pPr algn="r" indent="0" marL="0">
+            <a:pPr marL="0" indent="0" algn="r">
               <a:buNone/>
             </a:pPr>
             <a:r>
@@ -3102,6 +2988,7 @@
         <a:solidFill>
           <a:srgbClr val="F3EEFB"/>
         </a:solidFill>
+        <a:effectLst/>
       </p:bgPr>
     </p:bg>
     <p:spTree>
@@ -3137,17 +3024,24 @@
           </a:solidFill>
           <a:ln/>
         </p:spPr>
+        <p:txBody>
+          <a:bodyPr/>
+          <a:lstStyle/>
+          <a:p>
+            <a:endParaRPr lang="ja-JP" altLang="en-US"/>
+          </a:p>
+        </p:txBody>
       </p:sp>
       <p:pic>
         <p:nvPicPr>
-          <p:cNvPr id="3" name="Image 0" descr="C:\Users\250028\AppData\Local\Temp\claude\C--laragon-www-Tsumige-Concierge\ad98fe4e-e237-4b8f-b37f-9ac5cabaa7e2\scratchpad\pptx/icon_gamepad_white.png">    </p:cNvPr>
+          <p:cNvPr id="3" name="Image 0" descr="C:\Users\250028\AppData\Local\Temp\claude\C--laragon-www-Tsumige-Concierge\ad98fe4e-e237-4b8f-b37f-9ac5cabaa7e2\scratchpad\pptx/icon_gamepad_white.png"/>
           <p:cNvPicPr>
             <a:picLocks noChangeAspect="1"/>
           </p:cNvPicPr>
           <p:nvPr/>
         </p:nvPicPr>
         <p:blipFill>
-          <a:blip r:embed="rId1"/>
+          <a:blip r:embed="rId3"/>
           <a:stretch>
             <a:fillRect/>
           </a:stretch>
@@ -3183,7 +3077,7 @@
           <a:bodyPr wrap="square" lIns="0" tIns="0" rIns="0" bIns="0" rtlCol="0" anchor="ctr"/>
           <a:lstStyle/>
           <a:p>
-            <a:pPr algn="ctr" indent="0" marL="0">
+            <a:pPr marL="0" indent="0" algn="ctr">
               <a:buNone/>
             </a:pPr>
             <a:r>
@@ -3222,7 +3116,7 @@
           <a:bodyPr wrap="square" lIns="0" tIns="0" rIns="0" bIns="0" rtlCol="0" anchor="ctr"/>
           <a:lstStyle/>
           <a:p>
-            <a:pPr algn="ctr" indent="0" marL="0">
+            <a:pPr marL="0" indent="0" algn="ctr">
               <a:buNone/>
             </a:pPr>
             <a:r>
@@ -3261,13 +3155,20 @@
           </a:solidFill>
           <a:ln/>
           <a:effectLst>
-            <a:outerShdw sx="100000" sy="100000" kx="0" ky="0" algn="bl" rotWithShape="0" blurRad="76200" dist="25400" dir="5400000">
+            <a:outerShdw blurRad="76200" dist="25400" dir="5400000" algn="bl" rotWithShape="0">
               <a:srgbClr val="000000">
                 <a:alpha val="15000"/>
               </a:srgbClr>
             </a:outerShdw>
           </a:effectLst>
         </p:spPr>
+        <p:txBody>
+          <a:bodyPr/>
+          <a:lstStyle/>
+          <a:p>
+            <a:endParaRPr lang="ja-JP" altLang="en-US"/>
+          </a:p>
+        </p:txBody>
       </p:sp>
       <p:sp>
         <p:nvSpPr>
@@ -3290,7 +3191,7 @@
           <a:bodyPr wrap="square" lIns="0" tIns="0" rIns="0" bIns="0" rtlCol="0" anchor="ctr"/>
           <a:lstStyle/>
           <a:p>
-            <a:pPr algn="ctr" indent="0" marL="0">
+            <a:pPr marL="0" indent="0" algn="ctr">
               <a:buNone/>
             </a:pPr>
             <a:r>
@@ -3329,13 +3230,20 @@
           </a:solidFill>
           <a:ln/>
           <a:effectLst>
-            <a:outerShdw sx="100000" sy="100000" kx="0" ky="0" algn="bl" rotWithShape="0" blurRad="76200" dist="25400" dir="5400000">
+            <a:outerShdw blurRad="76200" dist="25400" dir="5400000" algn="bl" rotWithShape="0">
               <a:srgbClr val="000000">
                 <a:alpha val="15000"/>
               </a:srgbClr>
             </a:outerShdw>
           </a:effectLst>
         </p:spPr>
+        <p:txBody>
+          <a:bodyPr/>
+          <a:lstStyle/>
+          <a:p>
+            <a:endParaRPr lang="ja-JP" altLang="en-US"/>
+          </a:p>
+        </p:txBody>
       </p:sp>
       <p:sp>
         <p:nvSpPr>
@@ -3358,7 +3266,7 @@
           <a:bodyPr wrap="square" lIns="0" tIns="0" rIns="0" bIns="0" rtlCol="0" anchor="ctr"/>
           <a:lstStyle/>
           <a:p>
-            <a:pPr algn="ctr" indent="0" marL="0">
+            <a:pPr marL="0" indent="0" algn="ctr">
               <a:buNone/>
             </a:pPr>
             <a:r>
@@ -3397,13 +3305,20 @@
           </a:solidFill>
           <a:ln/>
           <a:effectLst>
-            <a:outerShdw sx="100000" sy="100000" kx="0" ky="0" algn="bl" rotWithShape="0" blurRad="76200" dist="25400" dir="5400000">
+            <a:outerShdw blurRad="76200" dist="25400" dir="5400000" algn="bl" rotWithShape="0">
               <a:srgbClr val="000000">
                 <a:alpha val="15000"/>
               </a:srgbClr>
             </a:outerShdw>
           </a:effectLst>
         </p:spPr>
+        <p:txBody>
+          <a:bodyPr/>
+          <a:lstStyle/>
+          <a:p>
+            <a:endParaRPr lang="ja-JP" altLang="en-US"/>
+          </a:p>
+        </p:txBody>
       </p:sp>
       <p:sp>
         <p:nvSpPr>
@@ -3426,7 +3341,7 @@
           <a:bodyPr wrap="square" lIns="0" tIns="0" rIns="0" bIns="0" rtlCol="0" anchor="ctr"/>
           <a:lstStyle/>
           <a:p>
-            <a:pPr algn="ctr" indent="0" marL="0">
+            <a:pPr marL="0" indent="0" algn="ctr">
               <a:buNone/>
             </a:pPr>
             <a:r>
@@ -3465,7 +3380,7 @@
           <a:bodyPr wrap="square" lIns="0" tIns="0" rIns="0" bIns="0" rtlCol="0" anchor="ctr"/>
           <a:lstStyle/>
           <a:p>
-            <a:pPr algn="r" indent="0" marL="0">
+            <a:pPr marL="0" indent="0" algn="r">
               <a:buNone/>
             </a:pPr>
             <a:r>
@@ -3499,6 +3414,7 @@
         <a:solidFill>
           <a:srgbClr val="FFFFFF"/>
         </a:solidFill>
+        <a:effectLst/>
       </p:bgPr>
     </p:bg>
     <p:spTree>
@@ -3534,17 +3450,24 @@
           </a:solidFill>
           <a:ln/>
         </p:spPr>
+        <p:txBody>
+          <a:bodyPr/>
+          <a:lstStyle/>
+          <a:p>
+            <a:endParaRPr lang="ja-JP" altLang="en-US"/>
+          </a:p>
+        </p:txBody>
       </p:sp>
       <p:pic>
         <p:nvPicPr>
-          <p:cNvPr id="3" name="Image 0" descr="C:\Users\250028\AppData\Local\Temp\claude\C--laragon-www-Tsumige-Concierge\ad98fe4e-e237-4b8f-b37f-9ac5cabaa7e2\scratchpad\pptx/icon_laptop_white.png">    </p:cNvPr>
+          <p:cNvPr id="3" name="Image 0" descr="C:\Users\250028\AppData\Local\Temp\claude\C--laragon-www-Tsumige-Concierge\ad98fe4e-e237-4b8f-b37f-9ac5cabaa7e2\scratchpad\pptx/icon_laptop_white.png"/>
           <p:cNvPicPr>
             <a:picLocks noChangeAspect="1"/>
           </p:cNvPicPr>
           <p:nvPr/>
         </p:nvPicPr>
         <p:blipFill>
-          <a:blip r:embed="rId1"/>
+          <a:blip r:embed="rId3"/>
           <a:stretch>
             <a:fillRect/>
           </a:stretch>
@@ -3580,7 +3503,7 @@
           <a:bodyPr wrap="square" lIns="0" tIns="0" rIns="0" bIns="0" rtlCol="0" anchor="ctr"/>
           <a:lstStyle/>
           <a:p>
-            <a:pPr indent="0" marL="0">
+            <a:pPr marL="0" indent="0">
               <a:buNone/>
             </a:pPr>
             <a:r>
@@ -3614,15 +3537,27 @@
         </p:nvGraphicFramePr>
         <p:xfrm>
           <a:off x="822960" y="1554480"/>
-          <a:ext cx="10515600" cy="914400"/>
+          <a:ext cx="10515600" cy="2819400"/>
         </p:xfrm>
         <a:graphic>
           <a:graphicData uri="http://schemas.openxmlformats.org/drawingml/2006/table">
             <a:tbl>
               <a:tblPr/>
               <a:tblGrid>
-                <a:gridCol w="2926080"/>
-                <a:gridCol w="7589520"/>
+                <a:gridCol w="2926080">
+                  <a:extLst>
+                    <a:ext uri="{9D8B030D-6E8A-4147-A177-3AD203B41FA5}">
+                      <a16:colId xmlns:a16="http://schemas.microsoft.com/office/drawing/2014/main" val="20000"/>
+                    </a:ext>
+                  </a:extLst>
+                </a:gridCol>
+                <a:gridCol w="7589520">
+                  <a:extLst>
+                    <a:ext uri="{9D8B030D-6E8A-4147-A177-3AD203B41FA5}">
+                      <a16:colId xmlns:a16="http://schemas.microsoft.com/office/drawing/2014/main" val="20001"/>
+                    </a:ext>
+                  </a:extLst>
+                </a:gridCol>
               </a:tblGrid>
               <a:tr h="0">
                 <a:tc>
@@ -3630,7 +3565,7 @@
                     <a:bodyPr/>
                     <a:lstStyle/>
                     <a:p>
-                      <a:pPr algn="l" indent="0" marL="0">
+                      <a:pPr marL="0" indent="0" algn="l">
                         <a:buNone/>
                       </a:pPr>
                       <a:r>
@@ -3698,7 +3633,7 @@
                     <a:bodyPr/>
                     <a:lstStyle/>
                     <a:p>
-                      <a:pPr algn="l" indent="0" marL="0">
+                      <a:pPr marL="0" indent="0" algn="l">
                         <a:buNone/>
                       </a:pPr>
                       <a:r>
@@ -3761,6 +3696,11 @@
                     </a:solidFill>
                   </a:tcPr>
                 </a:tc>
+                <a:extLst>
+                  <a:ext uri="{0D108BD9-81ED-4DB2-BD59-A6C34878D82A}">
+                    <a16:rowId xmlns:a16="http://schemas.microsoft.com/office/drawing/2014/main" val="10000"/>
+                  </a:ext>
+                </a:extLst>
               </a:tr>
               <a:tr h="0">
                 <a:tc>
@@ -3768,7 +3708,7 @@
                     <a:bodyPr/>
                     <a:lstStyle/>
                     <a:p>
-                      <a:pPr algn="l" indent="0" marL="0">
+                      <a:pPr marL="0" indent="0" algn="l">
                         <a:buNone/>
                       </a:pPr>
                       <a:r>
@@ -3836,7 +3776,7 @@
                     <a:bodyPr/>
                     <a:lstStyle/>
                     <a:p>
-                      <a:pPr algn="l" indent="0" marL="0">
+                      <a:pPr marL="0" indent="0" algn="l">
                         <a:buNone/>
                       </a:pPr>
                       <a:r>
@@ -3899,6 +3839,11 @@
                     </a:solidFill>
                   </a:tcPr>
                 </a:tc>
+                <a:extLst>
+                  <a:ext uri="{0D108BD9-81ED-4DB2-BD59-A6C34878D82A}">
+                    <a16:rowId xmlns:a16="http://schemas.microsoft.com/office/drawing/2014/main" val="10001"/>
+                  </a:ext>
+                </a:extLst>
               </a:tr>
               <a:tr h="0">
                 <a:tc>
@@ -3906,7 +3851,7 @@
                     <a:bodyPr/>
                     <a:lstStyle/>
                     <a:p>
-                      <a:pPr algn="l" indent="0" marL="0">
+                      <a:pPr marL="0" indent="0" algn="l">
                         <a:buNone/>
                       </a:pPr>
                       <a:r>
@@ -3974,7 +3919,7 @@
                     <a:bodyPr/>
                     <a:lstStyle/>
                     <a:p>
-                      <a:pPr algn="l" indent="0" marL="0">
+                      <a:pPr marL="0" indent="0" algn="l">
                         <a:buNone/>
                       </a:pPr>
                       <a:r>
@@ -4037,6 +3982,11 @@
                     </a:solidFill>
                   </a:tcPr>
                 </a:tc>
+                <a:extLst>
+                  <a:ext uri="{0D108BD9-81ED-4DB2-BD59-A6C34878D82A}">
+                    <a16:rowId xmlns:a16="http://schemas.microsoft.com/office/drawing/2014/main" val="10002"/>
+                  </a:ext>
+                </a:extLst>
               </a:tr>
               <a:tr h="0">
                 <a:tc>
@@ -4044,7 +3994,7 @@
                     <a:bodyPr/>
                     <a:lstStyle/>
                     <a:p>
-                      <a:pPr algn="l" indent="0" marL="0">
+                      <a:pPr marL="0" indent="0" algn="l">
                         <a:buNone/>
                       </a:pPr>
                       <a:r>
@@ -4112,7 +4062,7 @@
                     <a:bodyPr/>
                     <a:lstStyle/>
                     <a:p>
-                      <a:pPr algn="l" indent="0" marL="0">
+                      <a:pPr marL="0" indent="0" algn="l">
                         <a:buNone/>
                       </a:pPr>
                       <a:r>
@@ -4175,6 +4125,11 @@
                     </a:solidFill>
                   </a:tcPr>
                 </a:tc>
+                <a:extLst>
+                  <a:ext uri="{0D108BD9-81ED-4DB2-BD59-A6C34878D82A}">
+                    <a16:rowId xmlns:a16="http://schemas.microsoft.com/office/drawing/2014/main" val="10003"/>
+                  </a:ext>
+                </a:extLst>
               </a:tr>
               <a:tr h="0">
                 <a:tc>
@@ -4182,7 +4137,7 @@
                     <a:bodyPr/>
                     <a:lstStyle/>
                     <a:p>
-                      <a:pPr algn="l" indent="0" marL="0">
+                      <a:pPr marL="0" indent="0" algn="l">
                         <a:buNone/>
                       </a:pPr>
                       <a:r>
@@ -4250,7 +4205,7 @@
                     <a:bodyPr/>
                     <a:lstStyle/>
                     <a:p>
-                      <a:pPr algn="l" indent="0" marL="0">
+                      <a:pPr marL="0" indent="0" algn="l">
                         <a:buNone/>
                       </a:pPr>
                       <a:r>
@@ -4313,6 +4268,11 @@
                     </a:solidFill>
                   </a:tcPr>
                 </a:tc>
+                <a:extLst>
+                  <a:ext uri="{0D108BD9-81ED-4DB2-BD59-A6C34878D82A}">
+                    <a16:rowId xmlns:a16="http://schemas.microsoft.com/office/drawing/2014/main" val="10004"/>
+                  </a:ext>
+                </a:extLst>
               </a:tr>
               <a:tr h="0">
                 <a:tc>
@@ -4320,7 +4280,7 @@
                     <a:bodyPr/>
                     <a:lstStyle/>
                     <a:p>
-                      <a:pPr algn="l" indent="0" marL="0">
+                      <a:pPr marL="0" indent="0" algn="l">
                         <a:buNone/>
                       </a:pPr>
                       <a:r>
@@ -4388,7 +4348,7 @@
                     <a:bodyPr/>
                     <a:lstStyle/>
                     <a:p>
-                      <a:pPr algn="l" indent="0" marL="0">
+                      <a:pPr marL="0" indent="0" algn="l">
                         <a:buNone/>
                       </a:pPr>
                       <a:r>
@@ -4451,6 +4411,11 @@
                     </a:solidFill>
                   </a:tcPr>
                 </a:tc>
+                <a:extLst>
+                  <a:ext uri="{0D108BD9-81ED-4DB2-BD59-A6C34878D82A}">
+                    <a16:rowId xmlns:a16="http://schemas.microsoft.com/office/drawing/2014/main" val="10005"/>
+                  </a:ext>
+                </a:extLst>
               </a:tr>
               <a:tr h="0">
                 <a:tc>
@@ -4458,7 +4423,7 @@
                     <a:bodyPr/>
                     <a:lstStyle/>
                     <a:p>
-                      <a:pPr algn="l" indent="0" marL="0">
+                      <a:pPr marL="0" indent="0" algn="l">
                         <a:buNone/>
                       </a:pPr>
                       <a:r>
@@ -4526,7 +4491,7 @@
                     <a:bodyPr/>
                     <a:lstStyle/>
                     <a:p>
-                      <a:pPr algn="l" indent="0" marL="0">
+                      <a:pPr marL="0" indent="0" algn="l">
                         <a:buNone/>
                       </a:pPr>
                       <a:r>
@@ -4589,6 +4554,11 @@
                     </a:solidFill>
                   </a:tcPr>
                 </a:tc>
+                <a:extLst>
+                  <a:ext uri="{0D108BD9-81ED-4DB2-BD59-A6C34878D82A}">
+                    <a16:rowId xmlns:a16="http://schemas.microsoft.com/office/drawing/2014/main" val="10006"/>
+                  </a:ext>
+                </a:extLst>
               </a:tr>
               <a:tr h="0">
                 <a:tc>
@@ -4596,7 +4566,7 @@
                     <a:bodyPr/>
                     <a:lstStyle/>
                     <a:p>
-                      <a:pPr algn="l" indent="0" marL="0">
+                      <a:pPr marL="0" indent="0" algn="l">
                         <a:buNone/>
                       </a:pPr>
                       <a:r>
@@ -4664,7 +4634,7 @@
                     <a:bodyPr/>
                     <a:lstStyle/>
                     <a:p>
-                      <a:pPr algn="l" indent="0" marL="0">
+                      <a:pPr marL="0" indent="0" algn="l">
                         <a:buNone/>
                       </a:pPr>
                       <a:r>
@@ -4727,6 +4697,11 @@
                     </a:solidFill>
                   </a:tcPr>
                 </a:tc>
+                <a:extLst>
+                  <a:ext uri="{0D108BD9-81ED-4DB2-BD59-A6C34878D82A}">
+                    <a16:rowId xmlns:a16="http://schemas.microsoft.com/office/drawing/2014/main" val="10007"/>
+                  </a:ext>
+                </a:extLst>
               </a:tr>
             </a:tbl>
           </a:graphicData>
@@ -4753,7 +4728,7 @@
           <a:bodyPr wrap="square" lIns="0" tIns="0" rIns="0" bIns="0" rtlCol="0" anchor="ctr"/>
           <a:lstStyle/>
           <a:p>
-            <a:pPr algn="r" indent="0" marL="0">
+            <a:pPr marL="0" indent="0" algn="r">
               <a:buNone/>
             </a:pPr>
             <a:r>
@@ -4787,6 +4762,7 @@
         <a:solidFill>
           <a:srgbClr val="FFFFFF"/>
         </a:solidFill>
+        <a:effectLst/>
       </p:bgPr>
     </p:bg>
     <p:spTree>
@@ -4822,17 +4798,24 @@
           </a:solidFill>
           <a:ln/>
         </p:spPr>
+        <p:txBody>
+          <a:bodyPr/>
+          <a:lstStyle/>
+          <a:p>
+            <a:endParaRPr lang="ja-JP" altLang="en-US"/>
+          </a:p>
+        </p:txBody>
       </p:sp>
       <p:pic>
         <p:nvPicPr>
-          <p:cNvPr id="3" name="Image 0" descr="C:\Users\250028\AppData\Local\Temp\claude\C--laragon-www-Tsumige-Concierge\ad98fe4e-e237-4b8f-b37f-9ac5cabaa7e2\scratchpad\pptx/icon_check_white.png">    </p:cNvPr>
+          <p:cNvPr id="3" name="Image 0" descr="C:\Users\250028\AppData\Local\Temp\claude\C--laragon-www-Tsumige-Concierge\ad98fe4e-e237-4b8f-b37f-9ac5cabaa7e2\scratchpad\pptx/icon_check_white.png"/>
           <p:cNvPicPr>
             <a:picLocks noChangeAspect="1"/>
           </p:cNvPicPr>
           <p:nvPr/>
         </p:nvPicPr>
         <p:blipFill>
-          <a:blip r:embed="rId1"/>
+          <a:blip r:embed="rId3"/>
           <a:stretch>
             <a:fillRect/>
           </a:stretch>
@@ -4868,7 +4851,7 @@
           <a:bodyPr wrap="square" lIns="0" tIns="0" rIns="0" bIns="0" rtlCol="0" anchor="ctr"/>
           <a:lstStyle/>
           <a:p>
-            <a:pPr indent="0" marL="0">
+            <a:pPr marL="0" indent="0">
               <a:buNone/>
             </a:pPr>
             <a:r>
@@ -4907,6 +4890,13 @@
           </a:solidFill>
           <a:ln/>
         </p:spPr>
+        <p:txBody>
+          <a:bodyPr/>
+          <a:lstStyle/>
+          <a:p>
+            <a:endParaRPr lang="ja-JP" altLang="en-US"/>
+          </a:p>
+        </p:txBody>
       </p:sp>
       <p:sp>
         <p:nvSpPr>
@@ -4927,17 +4917,24 @@
           </a:solidFill>
           <a:ln/>
         </p:spPr>
+        <p:txBody>
+          <a:bodyPr/>
+          <a:lstStyle/>
+          <a:p>
+            <a:endParaRPr lang="ja-JP" altLang="en-US"/>
+          </a:p>
+        </p:txBody>
       </p:sp>
       <p:pic>
         <p:nvPicPr>
-          <p:cNvPr id="7" name="Image 1" descr="C:\Users\250028\AppData\Local\Temp\claude\C--laragon-www-Tsumige-Concierge\ad98fe4e-e237-4b8f-b37f-9ac5cabaa7e2\scratchpad\pptx/icon_check_white.png">    </p:cNvPr>
+          <p:cNvPr id="7" name="Image 1" descr="C:\Users\250028\AppData\Local\Temp\claude\C--laragon-www-Tsumige-Concierge\ad98fe4e-e237-4b8f-b37f-9ac5cabaa7e2\scratchpad\pptx/icon_check_white.png"/>
           <p:cNvPicPr>
             <a:picLocks noChangeAspect="1"/>
           </p:cNvPicPr>
           <p:nvPr/>
         </p:nvPicPr>
         <p:blipFill>
-          <a:blip r:embed="rId2"/>
+          <a:blip r:embed="rId3"/>
           <a:stretch>
             <a:fillRect/>
           </a:stretch>
@@ -4973,7 +4970,7 @@
           <a:bodyPr wrap="square" lIns="0" tIns="0" rIns="0" bIns="0" rtlCol="0" anchor="ctr"/>
           <a:lstStyle/>
           <a:p>
-            <a:pPr algn="ctr" indent="0" marL="0">
+            <a:pPr marL="0" indent="0" algn="ctr">
               <a:buNone/>
             </a:pPr>
             <a:r>
@@ -5012,7 +5009,7 @@
           <a:bodyPr wrap="square" lIns="0" tIns="0" rIns="0" bIns="0" rtlCol="0" anchor="t"/>
           <a:lstStyle/>
           <a:p>
-            <a:pPr algn="ctr" indent="0" marL="0">
+            <a:pPr marL="0" indent="0" algn="ctr">
               <a:buNone/>
             </a:pPr>
             <a:r>
@@ -5038,7 +5035,7 @@
         </p:nvSpPr>
         <p:spPr>
           <a:xfrm>
-            <a:off x="1097280" y="3931920"/>
+            <a:off x="1097280" y="3745064"/>
             <a:ext cx="4572000" cy="365760"/>
           </a:xfrm>
           <a:prstGeom prst="rect">
@@ -5051,7 +5048,7 @@
           <a:bodyPr wrap="square" lIns="0" tIns="0" rIns="0" bIns="0" rtlCol="0" anchor="ctr"/>
           <a:lstStyle/>
           <a:p>
-            <a:pPr algn="ctr" indent="0" marL="0">
+            <a:pPr marL="0" indent="0" algn="ctr">
               <a:buNone/>
             </a:pPr>
             <a:r>
@@ -5090,6 +5087,13 @@
           </a:solidFill>
           <a:ln/>
         </p:spPr>
+        <p:txBody>
+          <a:bodyPr/>
+          <a:lstStyle/>
+          <a:p>
+            <a:endParaRPr lang="ja-JP" altLang="en-US"/>
+          </a:p>
+        </p:txBody>
       </p:sp>
       <p:sp>
         <p:nvSpPr>
@@ -5110,10 +5114,17 @@
           </a:solidFill>
           <a:ln/>
         </p:spPr>
+        <p:txBody>
+          <a:bodyPr/>
+          <a:lstStyle/>
+          <a:p>
+            <a:endParaRPr lang="ja-JP" altLang="en-US"/>
+          </a:p>
+        </p:txBody>
       </p:sp>
       <p:pic>
         <p:nvPicPr>
-          <p:cNvPr id="13" name="Image 2" descr="C:\Users\250028\AppData\Local\Temp\claude\C--laragon-www-Tsumige-Concierge\ad98fe4e-e237-4b8f-b37f-9ac5cabaa7e2\scratchpad\pptx/icon_check_white.png">    </p:cNvPr>
+          <p:cNvPr id="13" name="Image 2" descr="C:\Users\250028\AppData\Local\Temp\claude\C--laragon-www-Tsumige-Concierge\ad98fe4e-e237-4b8f-b37f-9ac5cabaa7e2\scratchpad\pptx/icon_check_white.png"/>
           <p:cNvPicPr>
             <a:picLocks noChangeAspect="1"/>
           </p:cNvPicPr>
@@ -5156,7 +5167,7 @@
           <a:bodyPr wrap="square" lIns="0" tIns="0" rIns="0" bIns="0" rtlCol="0" anchor="ctr"/>
           <a:lstStyle/>
           <a:p>
-            <a:pPr algn="ctr" indent="0" marL="0">
+            <a:pPr marL="0" indent="0" algn="ctr">
               <a:buNone/>
             </a:pPr>
             <a:r>
@@ -5195,7 +5206,7 @@
           <a:bodyPr wrap="square" lIns="0" tIns="0" rIns="0" bIns="0" rtlCol="0" anchor="t"/>
           <a:lstStyle/>
           <a:p>
-            <a:pPr algn="ctr" indent="0" marL="0">
+            <a:pPr marL="0" indent="0" algn="ctr">
               <a:buNone/>
             </a:pPr>
             <a:r>
@@ -5221,7 +5232,7 @@
         </p:nvSpPr>
         <p:spPr>
           <a:xfrm>
-            <a:off x="6492240" y="3931920"/>
+            <a:off x="6492240" y="3745064"/>
             <a:ext cx="4572000" cy="365760"/>
           </a:xfrm>
           <a:prstGeom prst="rect">
@@ -5234,7 +5245,7 @@
           <a:bodyPr wrap="square" lIns="0" tIns="0" rIns="0" bIns="0" rtlCol="0" anchor="ctr"/>
           <a:lstStyle/>
           <a:p>
-            <a:pPr algn="ctr" indent="0" marL="0">
+            <a:pPr marL="0" indent="0" algn="ctr">
               <a:buNone/>
             </a:pPr>
             <a:r>
@@ -5273,7 +5284,7 @@
           <a:bodyPr wrap="square" lIns="0" tIns="0" rIns="0" bIns="0" rtlCol="0" anchor="ctr"/>
           <a:lstStyle/>
           <a:p>
-            <a:pPr algn="ctr" indent="0" marL="0">
+            <a:pPr marL="0" indent="0" algn="ctr">
               <a:buNone/>
             </a:pPr>
             <a:r>
@@ -5312,7 +5323,7 @@
           <a:bodyPr wrap="square" lIns="0" tIns="0" rIns="0" bIns="0" rtlCol="0" anchor="ctr"/>
           <a:lstStyle/>
           <a:p>
-            <a:pPr algn="r" indent="0" marL="0">
+            <a:pPr marL="0" indent="0" algn="r">
               <a:buNone/>
             </a:pPr>
             <a:r>
@@ -5346,6 +5357,7 @@
         <a:solidFill>
           <a:srgbClr val="FFFFFF"/>
         </a:solidFill>
+        <a:effectLst/>
       </p:bgPr>
     </p:bg>
     <p:spTree>
@@ -5381,17 +5393,24 @@
           </a:solidFill>
           <a:ln/>
         </p:spPr>
+        <p:txBody>
+          <a:bodyPr/>
+          <a:lstStyle/>
+          <a:p>
+            <a:endParaRPr lang="ja-JP" altLang="en-US"/>
+          </a:p>
+        </p:txBody>
       </p:sp>
       <p:pic>
         <p:nvPicPr>
-          <p:cNvPr id="3" name="Image 0" descr="C:\Users\250028\AppData\Local\Temp\claude\C--laragon-www-Tsumige-Concierge\ad98fe4e-e237-4b8f-b37f-9ac5cabaa7e2\scratchpad\pptx/icon_times_white.png">    </p:cNvPr>
+          <p:cNvPr id="3" name="Image 0" descr="C:\Users\250028\AppData\Local\Temp\claude\C--laragon-www-Tsumige-Concierge\ad98fe4e-e237-4b8f-b37f-9ac5cabaa7e2\scratchpad\pptx/icon_times_white.png"/>
           <p:cNvPicPr>
             <a:picLocks noChangeAspect="1"/>
           </p:cNvPicPr>
           <p:nvPr/>
         </p:nvPicPr>
         <p:blipFill>
-          <a:blip r:embed="rId1"/>
+          <a:blip r:embed="rId3"/>
           <a:stretch>
             <a:fillRect/>
           </a:stretch>
@@ -5427,7 +5446,7 @@
           <a:bodyPr wrap="square" lIns="0" tIns="0" rIns="0" bIns="0" rtlCol="0" anchor="ctr"/>
           <a:lstStyle/>
           <a:p>
-            <a:pPr indent="0" marL="0">
+            <a:pPr marL="0" indent="0">
               <a:buNone/>
             </a:pPr>
             <a:r>
@@ -5461,16 +5480,34 @@
         </p:nvGraphicFramePr>
         <p:xfrm>
           <a:off x="822960" y="1554480"/>
-          <a:ext cx="10515600" cy="914400"/>
+          <a:ext cx="10515600" cy="1767840"/>
         </p:xfrm>
         <a:graphic>
           <a:graphicData uri="http://schemas.openxmlformats.org/drawingml/2006/table">
             <a:tbl>
               <a:tblPr/>
               <a:tblGrid>
-                <a:gridCol w="2377440"/>
-                <a:gridCol w="4480560"/>
-                <a:gridCol w="3657600"/>
+                <a:gridCol w="2377440">
+                  <a:extLst>
+                    <a:ext uri="{9D8B030D-6E8A-4147-A177-3AD203B41FA5}">
+                      <a16:colId xmlns:a16="http://schemas.microsoft.com/office/drawing/2014/main" val="20000"/>
+                    </a:ext>
+                  </a:extLst>
+                </a:gridCol>
+                <a:gridCol w="4480560">
+                  <a:extLst>
+                    <a:ext uri="{9D8B030D-6E8A-4147-A177-3AD203B41FA5}">
+                      <a16:colId xmlns:a16="http://schemas.microsoft.com/office/drawing/2014/main" val="20001"/>
+                    </a:ext>
+                  </a:extLst>
+                </a:gridCol>
+                <a:gridCol w="3657600">
+                  <a:extLst>
+                    <a:ext uri="{9D8B030D-6E8A-4147-A177-3AD203B41FA5}">
+                      <a16:colId xmlns:a16="http://schemas.microsoft.com/office/drawing/2014/main" val="20002"/>
+                    </a:ext>
+                  </a:extLst>
+                </a:gridCol>
               </a:tblGrid>
               <a:tr h="0">
                 <a:tc>
@@ -5478,7 +5515,7 @@
                     <a:bodyPr/>
                     <a:lstStyle/>
                     <a:p>
-                      <a:pPr algn="l" indent="0" marL="0">
+                      <a:pPr marL="0" indent="0" algn="l">
                         <a:buNone/>
                       </a:pPr>
                       <a:r>
@@ -5546,7 +5583,7 @@
                     <a:bodyPr/>
                     <a:lstStyle/>
                     <a:p>
-                      <a:pPr algn="l" indent="0" marL="0">
+                      <a:pPr marL="0" indent="0" algn="l">
                         <a:buNone/>
                       </a:pPr>
                       <a:r>
@@ -5614,7 +5651,7 @@
                     <a:bodyPr/>
                     <a:lstStyle/>
                     <a:p>
-                      <a:pPr algn="l" indent="0" marL="0">
+                      <a:pPr marL="0" indent="0" algn="l">
                         <a:buNone/>
                       </a:pPr>
                       <a:r>
@@ -5677,6 +5714,11 @@
                     </a:solidFill>
                   </a:tcPr>
                 </a:tc>
+                <a:extLst>
+                  <a:ext uri="{0D108BD9-81ED-4DB2-BD59-A6C34878D82A}">
+                    <a16:rowId xmlns:a16="http://schemas.microsoft.com/office/drawing/2014/main" val="10000"/>
+                  </a:ext>
+                </a:extLst>
               </a:tr>
               <a:tr h="0">
                 <a:tc>
@@ -5684,7 +5726,7 @@
                     <a:bodyPr/>
                     <a:lstStyle/>
                     <a:p>
-                      <a:pPr algn="l" indent="0" marL="0">
+                      <a:pPr marL="0" indent="0" algn="l">
                         <a:buNone/>
                       </a:pPr>
                       <a:r>
@@ -5752,7 +5794,7 @@
                     <a:bodyPr/>
                     <a:lstStyle/>
                     <a:p>
-                      <a:pPr algn="l" indent="0" marL="0">
+                      <a:pPr marL="0" indent="0" algn="l">
                         <a:buNone/>
                       </a:pPr>
                       <a:r>
@@ -5820,7 +5862,7 @@
                     <a:bodyPr/>
                     <a:lstStyle/>
                     <a:p>
-                      <a:pPr algn="l" indent="0" marL="0">
+                      <a:pPr marL="0" indent="0" algn="l">
                         <a:buNone/>
                       </a:pPr>
                       <a:r>
@@ -5883,6 +5925,11 @@
                     </a:solidFill>
                   </a:tcPr>
                 </a:tc>
+                <a:extLst>
+                  <a:ext uri="{0D108BD9-81ED-4DB2-BD59-A6C34878D82A}">
+                    <a16:rowId xmlns:a16="http://schemas.microsoft.com/office/drawing/2014/main" val="10001"/>
+                  </a:ext>
+                </a:extLst>
               </a:tr>
               <a:tr h="0">
                 <a:tc>
@@ -5890,7 +5937,7 @@
                     <a:bodyPr/>
                     <a:lstStyle/>
                     <a:p>
-                      <a:pPr algn="l" indent="0" marL="0">
+                      <a:pPr marL="0" indent="0" algn="l">
                         <a:buNone/>
                       </a:pPr>
                       <a:r>
@@ -5958,7 +6005,7 @@
                     <a:bodyPr/>
                     <a:lstStyle/>
                     <a:p>
-                      <a:pPr algn="l" indent="0" marL="0">
+                      <a:pPr marL="0" indent="0" algn="l">
                         <a:buNone/>
                       </a:pPr>
                       <a:r>
@@ -6026,7 +6073,7 @@
                     <a:bodyPr/>
                     <a:lstStyle/>
                     <a:p>
-                      <a:pPr algn="l" indent="0" marL="0">
+                      <a:pPr marL="0" indent="0" algn="l">
                         <a:buNone/>
                       </a:pPr>
                       <a:r>
@@ -6089,6 +6136,11 @@
                     </a:solidFill>
                   </a:tcPr>
                 </a:tc>
+                <a:extLst>
+                  <a:ext uri="{0D108BD9-81ED-4DB2-BD59-A6C34878D82A}">
+                    <a16:rowId xmlns:a16="http://schemas.microsoft.com/office/drawing/2014/main" val="10002"/>
+                  </a:ext>
+                </a:extLst>
               </a:tr>
               <a:tr h="0">
                 <a:tc>
@@ -6096,7 +6148,7 @@
                     <a:bodyPr/>
                     <a:lstStyle/>
                     <a:p>
-                      <a:pPr algn="l" indent="0" marL="0">
+                      <a:pPr marL="0" indent="0" algn="l">
                         <a:buNone/>
                       </a:pPr>
                       <a:r>
@@ -6164,7 +6216,7 @@
                     <a:bodyPr/>
                     <a:lstStyle/>
                     <a:p>
-                      <a:pPr algn="l" indent="0" marL="0">
+                      <a:pPr marL="0" indent="0" algn="l">
                         <a:buNone/>
                       </a:pPr>
                       <a:r>
@@ -6232,7 +6284,7 @@
                     <a:bodyPr/>
                     <a:lstStyle/>
                     <a:p>
-                      <a:pPr algn="l" indent="0" marL="0">
+                      <a:pPr marL="0" indent="0" algn="l">
                         <a:buNone/>
                       </a:pPr>
                       <a:r>
@@ -6295,6 +6347,11 @@
                     </a:solidFill>
                   </a:tcPr>
                 </a:tc>
+                <a:extLst>
+                  <a:ext uri="{0D108BD9-81ED-4DB2-BD59-A6C34878D82A}">
+                    <a16:rowId xmlns:a16="http://schemas.microsoft.com/office/drawing/2014/main" val="10003"/>
+                  </a:ext>
+                </a:extLst>
               </a:tr>
               <a:tr h="0">
                 <a:tc>
@@ -6302,7 +6359,7 @@
                     <a:bodyPr/>
                     <a:lstStyle/>
                     <a:p>
-                      <a:pPr algn="l" indent="0" marL="0">
+                      <a:pPr marL="0" indent="0" algn="l">
                         <a:buNone/>
                       </a:pPr>
                       <a:r>
@@ -6370,7 +6427,7 @@
                     <a:bodyPr/>
                     <a:lstStyle/>
                     <a:p>
-                      <a:pPr algn="l" indent="0" marL="0">
+                      <a:pPr marL="0" indent="0" algn="l">
                         <a:buNone/>
                       </a:pPr>
                       <a:r>
@@ -6438,7 +6495,7 @@
                     <a:bodyPr/>
                     <a:lstStyle/>
                     <a:p>
-                      <a:pPr algn="l" indent="0" marL="0">
+                      <a:pPr marL="0" indent="0" algn="l">
                         <a:buNone/>
                       </a:pPr>
                       <a:r>
@@ -6501,6 +6558,11 @@
                     </a:solidFill>
                   </a:tcPr>
                 </a:tc>
+                <a:extLst>
+                  <a:ext uri="{0D108BD9-81ED-4DB2-BD59-A6C34878D82A}">
+                    <a16:rowId xmlns:a16="http://schemas.microsoft.com/office/drawing/2014/main" val="10004"/>
+                  </a:ext>
+                </a:extLst>
               </a:tr>
             </a:tbl>
           </a:graphicData>
@@ -6527,7 +6589,7 @@
           <a:bodyPr wrap="square" lIns="0" tIns="0" rIns="0" bIns="0" rtlCol="0" anchor="ctr"/>
           <a:lstStyle/>
           <a:p>
-            <a:pPr algn="r" indent="0" marL="0">
+            <a:pPr marL="0" indent="0" algn="r">
               <a:buNone/>
             </a:pPr>
             <a:r>
@@ -6561,6 +6623,7 @@
         <a:solidFill>
           <a:srgbClr val="1E1B3A"/>
         </a:solidFill>
+        <a:effectLst/>
       </p:bgPr>
     </p:bg>
     <p:spTree>
@@ -6596,17 +6659,24 @@
           </a:solidFill>
           <a:ln/>
         </p:spPr>
+        <p:txBody>
+          <a:bodyPr/>
+          <a:lstStyle/>
+          <a:p>
+            <a:endParaRPr lang="ja-JP" altLang="en-US"/>
+          </a:p>
+        </p:txBody>
       </p:sp>
       <p:pic>
         <p:nvPicPr>
-          <p:cNvPr id="3" name="Image 0" descr="C:\Users\250028\AppData\Local\Temp\claude\C--laragon-www-Tsumige-Concierge\ad98fe4e-e237-4b8f-b37f-9ac5cabaa7e2\scratchpad\pptx/icon_bulb_navy.png">    </p:cNvPr>
+          <p:cNvPr id="3" name="Image 0" descr="C:\Users\250028\AppData\Local\Temp\claude\C--laragon-www-Tsumige-Concierge\ad98fe4e-e237-4b8f-b37f-9ac5cabaa7e2\scratchpad\pptx/icon_bulb_navy.png"/>
           <p:cNvPicPr>
             <a:picLocks noChangeAspect="1"/>
           </p:cNvPicPr>
           <p:nvPr/>
         </p:nvPicPr>
         <p:blipFill>
-          <a:blip r:embed="rId1"/>
+          <a:blip r:embed="rId3"/>
           <a:stretch>
             <a:fillRect/>
           </a:stretch>
@@ -6642,7 +6712,7 @@
           <a:bodyPr wrap="square" lIns="0" tIns="0" rIns="0" bIns="0" rtlCol="0" anchor="ctr"/>
           <a:lstStyle/>
           <a:p>
-            <a:pPr algn="ctr" indent="0" marL="0">
+            <a:pPr marL="0" indent="0" algn="ctr">
               <a:buNone/>
             </a:pPr>
             <a:r>
@@ -6681,7 +6751,7 @@
           <a:bodyPr wrap="square" lIns="0" tIns="0" rIns="0" bIns="0" rtlCol="0" anchor="ctr"/>
           <a:lstStyle/>
           <a:p>
-            <a:pPr indent="0" marL="0">
+            <a:pPr marL="0" indent="0">
               <a:buNone/>
             </a:pPr>
             <a:r>
@@ -6805,7 +6875,7 @@
           <a:bodyPr wrap="square" lIns="0" tIns="0" rIns="0" bIns="0" rtlCol="0" anchor="ctr"/>
           <a:lstStyle/>
           <a:p>
-            <a:pPr indent="0" marL="0">
+            <a:pPr marL="0" indent="0">
               <a:buNone/>
             </a:pPr>
             <a:r>
@@ -7209,4 +7279,319 @@
     </a:ext>
   </a:extLst>
 </a:theme>
+</file>
+
+<file path=ppt/theme/theme2.xml><?xml version="1.0" encoding="utf-8"?>
+<a:theme xmlns:a="http://schemas.openxmlformats.org/drawingml/2006/main" name="Office テーマ">
+  <a:themeElements>
+    <a:clrScheme name="Office">
+      <a:dk1>
+        <a:sysClr val="windowText" lastClr="000000"/>
+      </a:dk1>
+      <a:lt1>
+        <a:sysClr val="window" lastClr="FFFFFF"/>
+      </a:lt1>
+      <a:dk2>
+        <a:srgbClr val="0E2841"/>
+      </a:dk2>
+      <a:lt2>
+        <a:srgbClr val="E8E8E8"/>
+      </a:lt2>
+      <a:accent1>
+        <a:srgbClr val="156082"/>
+      </a:accent1>
+      <a:accent2>
+        <a:srgbClr val="E97132"/>
+      </a:accent2>
+      <a:accent3>
+        <a:srgbClr val="196B24"/>
+      </a:accent3>
+      <a:accent4>
+        <a:srgbClr val="0F9ED5"/>
+      </a:accent4>
+      <a:accent5>
+        <a:srgbClr val="A02B93"/>
+      </a:accent5>
+      <a:accent6>
+        <a:srgbClr val="4EA72E"/>
+      </a:accent6>
+      <a:hlink>
+        <a:srgbClr val="467886"/>
+      </a:hlink>
+      <a:folHlink>
+        <a:srgbClr val="96607D"/>
+      </a:folHlink>
+    </a:clrScheme>
+    <a:fontScheme name="Office">
+      <a:majorFont>
+        <a:latin typeface="游ゴシック Light" panose="02110004020202020204"/>
+        <a:ea typeface=""/>
+        <a:cs typeface=""/>
+        <a:font script="Jpan" typeface="游ゴシック Light"/>
+        <a:font script="Hang" typeface="맑은 고딕"/>
+        <a:font script="Hans" typeface="等线 Light"/>
+        <a:font script="Hant" typeface="新細明體"/>
+        <a:font script="Arab" typeface="Times New Roman"/>
+        <a:font script="Hebr" typeface="Times New Roman"/>
+        <a:font script="Thai" typeface="Angsana New"/>
+        <a:font script="Ethi" typeface="Nyala"/>
+        <a:font script="Beng" typeface="Vrinda"/>
+        <a:font script="Gujr" typeface="Shruti"/>
+        <a:font script="Khmr" typeface="MoolBoran"/>
+        <a:font script="Knda" typeface="Tunga"/>
+        <a:font script="Guru" typeface="Raavi"/>
+        <a:font script="Cans" typeface="Euphemia"/>
+        <a:font script="Cher" typeface="Plantagenet Cherokee"/>
+        <a:font script="Yiii" typeface="Microsoft Yi Baiti"/>
+        <a:font script="Tibt" typeface="Microsoft Himalaya"/>
+        <a:font script="Thaa" typeface="MV Boli"/>
+        <a:font script="Deva" typeface="Mangal"/>
+        <a:font script="Telu" typeface="Gautami"/>
+        <a:font script="Taml" typeface="Latha"/>
+        <a:font script="Syrc" typeface="Estrangelo Edessa"/>
+        <a:font script="Orya" typeface="Kalinga"/>
+        <a:font script="Mlym" typeface="Kartika"/>
+        <a:font script="Laoo" typeface="DokChampa"/>
+        <a:font script="Sinh" typeface="Iskoola Pota"/>
+        <a:font script="Mong" typeface="Mongolian Baiti"/>
+        <a:font script="Viet" typeface="Times New Roman"/>
+        <a:font script="Uigh" typeface="Microsoft Uighur"/>
+        <a:font script="Geor" typeface="Sylfaen"/>
+        <a:font script="Armn" typeface="Arial"/>
+        <a:font script="Bugi" typeface="Leelawadee UI"/>
+        <a:font script="Bopo" typeface="Microsoft JhengHei"/>
+        <a:font script="Java" typeface="Javanese Text"/>
+        <a:font script="Lisu" typeface="Segoe UI"/>
+        <a:font script="Mymr" typeface="Myanmar Text"/>
+        <a:font script="Nkoo" typeface="Ebrima"/>
+        <a:font script="Olck" typeface="Nirmala UI"/>
+        <a:font script="Osma" typeface="Ebrima"/>
+        <a:font script="Phag" typeface="Phagspa"/>
+        <a:font script="Syrn" typeface="Estrangelo Edessa"/>
+        <a:font script="Syrj" typeface="Estrangelo Edessa"/>
+        <a:font script="Syre" typeface="Estrangelo Edessa"/>
+        <a:font script="Sora" typeface="Nirmala UI"/>
+        <a:font script="Tale" typeface="Microsoft Tai Le"/>
+        <a:font script="Talu" typeface="Microsoft New Tai Lue"/>
+        <a:font script="Tfng" typeface="Ebrima"/>
+      </a:majorFont>
+      <a:minorFont>
+        <a:latin typeface="游ゴシック" panose="02110004020202020204"/>
+        <a:ea typeface=""/>
+        <a:cs typeface=""/>
+        <a:font script="Jpan" typeface="游ゴシック"/>
+        <a:font script="Hang" typeface="맑은 고딕"/>
+        <a:font script="Hans" typeface="等线"/>
+        <a:font script="Hant" typeface="新細明體"/>
+        <a:font script="Arab" typeface="Arial"/>
+        <a:font script="Hebr" typeface="Arial"/>
+        <a:font script="Thai" typeface="Cordia New"/>
+        <a:font script="Ethi" typeface="Nyala"/>
+        <a:font script="Beng" typeface="Vrinda"/>
+        <a:font script="Gujr" typeface="Shruti"/>
+        <a:font script="Khmr" typeface="DaunPenh"/>
+        <a:font script="Knda" typeface="Tunga"/>
+        <a:font script="Guru" typeface="Raavi"/>
+        <a:font script="Cans" typeface="Euphemia"/>
+        <a:font script="Cher" typeface="Plantagenet Cherokee"/>
+        <a:font script="Yiii" typeface="Microsoft Yi Baiti"/>
+        <a:font script="Tibt" typeface="Microsoft Himalaya"/>
+        <a:font script="Thaa" typeface="MV Boli"/>
+        <a:font script="Deva" typeface="Mangal"/>
+        <a:font script="Telu" typeface="Gautami"/>
+        <a:font script="Taml" typeface="Latha"/>
+        <a:font script="Syrc" typeface="Estrangelo Edessa"/>
+        <a:font script="Orya" typeface="Kalinga"/>
+        <a:font script="Mlym" typeface="Kartika"/>
+        <a:font script="Laoo" typeface="DokChampa"/>
+        <a:font script="Sinh" typeface="Iskoola Pota"/>
+        <a:font script="Mong" typeface="Mongolian Baiti"/>
+        <a:font script="Viet" typeface="Arial"/>
+        <a:font script="Uigh" typeface="Microsoft Uighur"/>
+        <a:font script="Geor" typeface="Sylfaen"/>
+        <a:font script="Armn" typeface="Arial"/>
+        <a:font script="Bugi" typeface="Leelawadee UI"/>
+        <a:font script="Bopo" typeface="Microsoft JhengHei"/>
+        <a:font script="Java" typeface="Javanese Text"/>
+        <a:font script="Lisu" typeface="Segoe UI"/>
+        <a:font script="Mymr" typeface="Myanmar Text"/>
+        <a:font script="Nkoo" typeface="Ebrima"/>
+        <a:font script="Olck" typeface="Nirmala UI"/>
+        <a:font script="Osma" typeface="Ebrima"/>
+        <a:font script="Phag" typeface="Phagspa"/>
+        <a:font script="Syrn" typeface="Estrangelo Edessa"/>
+        <a:font script="Syrj" typeface="Estrangelo Edessa"/>
+        <a:font script="Syre" typeface="Estrangelo Edessa"/>
+        <a:font script="Sora" typeface="Nirmala UI"/>
+        <a:font script="Tale" typeface="Microsoft Tai Le"/>
+        <a:font script="Talu" typeface="Microsoft New Tai Lue"/>
+        <a:font script="Tfng" typeface="Ebrima"/>
+      </a:minorFont>
+    </a:fontScheme>
+    <a:fmtScheme name="Office">
+      <a:fillStyleLst>
+        <a:solidFill>
+          <a:schemeClr val="phClr"/>
+        </a:solidFill>
+        <a:gradFill rotWithShape="1">
+          <a:gsLst>
+            <a:gs pos="0">
+              <a:schemeClr val="phClr">
+                <a:lumMod val="110000"/>
+                <a:satMod val="105000"/>
+                <a:tint val="67000"/>
+              </a:schemeClr>
+            </a:gs>
+            <a:gs pos="50000">
+              <a:schemeClr val="phClr">
+                <a:lumMod val="105000"/>
+                <a:satMod val="103000"/>
+                <a:tint val="73000"/>
+              </a:schemeClr>
+            </a:gs>
+            <a:gs pos="100000">
+              <a:schemeClr val="phClr">
+                <a:lumMod val="105000"/>
+                <a:satMod val="109000"/>
+                <a:tint val="81000"/>
+              </a:schemeClr>
+            </a:gs>
+          </a:gsLst>
+          <a:lin ang="5400000" scaled="0"/>
+        </a:gradFill>
+        <a:gradFill rotWithShape="1">
+          <a:gsLst>
+            <a:gs pos="0">
+              <a:schemeClr val="phClr">
+                <a:satMod val="103000"/>
+                <a:lumMod val="102000"/>
+                <a:tint val="94000"/>
+              </a:schemeClr>
+            </a:gs>
+            <a:gs pos="50000">
+              <a:schemeClr val="phClr">
+                <a:satMod val="110000"/>
+                <a:lumMod val="100000"/>
+                <a:shade val="100000"/>
+              </a:schemeClr>
+            </a:gs>
+            <a:gs pos="100000">
+              <a:schemeClr val="phClr">
+                <a:lumMod val="99000"/>
+                <a:satMod val="120000"/>
+                <a:shade val="78000"/>
+              </a:schemeClr>
+            </a:gs>
+          </a:gsLst>
+          <a:lin ang="5400000" scaled="0"/>
+        </a:gradFill>
+      </a:fillStyleLst>
+      <a:lnStyleLst>
+        <a:ln w="12700" cap="flat" cmpd="sng" algn="ctr">
+          <a:solidFill>
+            <a:schemeClr val="phClr"/>
+          </a:solidFill>
+          <a:prstDash val="solid"/>
+          <a:miter lim="800000"/>
+        </a:ln>
+        <a:ln w="19050" cap="flat" cmpd="sng" algn="ctr">
+          <a:solidFill>
+            <a:schemeClr val="phClr"/>
+          </a:solidFill>
+          <a:prstDash val="solid"/>
+          <a:miter lim="800000"/>
+        </a:ln>
+        <a:ln w="25400" cap="flat" cmpd="sng" algn="ctr">
+          <a:solidFill>
+            <a:schemeClr val="phClr"/>
+          </a:solidFill>
+          <a:prstDash val="solid"/>
+          <a:miter lim="800000"/>
+        </a:ln>
+      </a:lnStyleLst>
+      <a:effectStyleLst>
+        <a:effectStyle>
+          <a:effectLst/>
+        </a:effectStyle>
+        <a:effectStyle>
+          <a:effectLst/>
+        </a:effectStyle>
+        <a:effectStyle>
+          <a:effectLst>
+            <a:outerShdw blurRad="57150" dist="19050" dir="5400000" algn="ctr" rotWithShape="0">
+              <a:srgbClr val="000000">
+                <a:alpha val="63000"/>
+              </a:srgbClr>
+            </a:outerShdw>
+          </a:effectLst>
+        </a:effectStyle>
+      </a:effectStyleLst>
+      <a:bgFillStyleLst>
+        <a:solidFill>
+          <a:schemeClr val="phClr"/>
+        </a:solidFill>
+        <a:solidFill>
+          <a:schemeClr val="phClr">
+            <a:tint val="95000"/>
+            <a:satMod val="170000"/>
+          </a:schemeClr>
+        </a:solidFill>
+        <a:gradFill rotWithShape="1">
+          <a:gsLst>
+            <a:gs pos="0">
+              <a:schemeClr val="phClr">
+                <a:tint val="93000"/>
+                <a:satMod val="150000"/>
+                <a:shade val="98000"/>
+                <a:lumMod val="102000"/>
+              </a:schemeClr>
+            </a:gs>
+            <a:gs pos="50000">
+              <a:schemeClr val="phClr">
+                <a:tint val="98000"/>
+                <a:satMod val="130000"/>
+                <a:shade val="90000"/>
+                <a:lumMod val="103000"/>
+              </a:schemeClr>
+            </a:gs>
+            <a:gs pos="100000">
+              <a:schemeClr val="phClr">
+                <a:shade val="63000"/>
+                <a:satMod val="120000"/>
+              </a:schemeClr>
+            </a:gs>
+          </a:gsLst>
+          <a:lin ang="5400000" scaled="0"/>
+        </a:gradFill>
+      </a:bgFillStyleLst>
+    </a:fmtScheme>
+  </a:themeElements>
+  <a:objectDefaults>
+    <a:lnDef>
+      <a:spPr/>
+      <a:bodyPr/>
+      <a:lstStyle/>
+      <a:style>
+        <a:lnRef idx="2">
+          <a:schemeClr val="accent1"/>
+        </a:lnRef>
+        <a:fillRef idx="0">
+          <a:schemeClr val="accent1"/>
+        </a:fillRef>
+        <a:effectRef idx="1">
+          <a:schemeClr val="accent1"/>
+        </a:effectRef>
+        <a:fontRef idx="minor">
+          <a:schemeClr val="tx1"/>
+        </a:fontRef>
+      </a:style>
+    </a:lnDef>
+  </a:objectDefaults>
+  <a:extraClrSchemeLst/>
+  <a:extLst>
+    <a:ext uri="{05A4C25C-085E-4340-85A3-A5531E510DB2}">
+      <thm15:themeFamily xmlns:thm15="http://schemas.microsoft.com/office/thememl/2012/main" name="Office Theme" id="{2E142A2C-CD16-42D6-873A-C26D2A0506FA}" vid="{1BDDFF52-6CD6-40A5-AB3C-68EB2F1E4D0A}"/>
+    </a:ext>
+  </a:extLst>
+</a:theme>
 </file>